--- a/m3/diapositivos/sessao-02-m3-f03.pptx
+++ b/m3/diapositivos/sessao-02-m3-f03.pptx
@@ -3137,7 +3137,35 @@
                 <a:ea typeface="Arial" pitchFamily="34" charset="-122"/>
                 <a:cs typeface="Arial" pitchFamily="34" charset="-120"/>
               </a:rPr>
-              <a:t>LER: OS LUSÍADAS, IV, 94 E 95 (1 DE 2)</a:t>
+              <a:t>LER: </a:t>
+            </a:r>
+            <a:pPr indent="0" marL="0">
+              <a:buNone/>
+            </a:pPr>
+            <a:r>
+              <a:rPr lang="en-US" sz="1100" b="1" i="1" spc="250" kern="0" dirty="0">
+                <a:solidFill>
+                  <a:srgbClr val="A9A79F"/>
+                </a:solidFill>
+                <a:latin typeface="Arial" pitchFamily="34" charset="0"/>
+                <a:ea typeface="Arial" pitchFamily="34" charset="-122"/>
+                <a:cs typeface="Arial" pitchFamily="34" charset="-120"/>
+              </a:rPr>
+              <a:t>OS LUSÍADAS</a:t>
+            </a:r>
+            <a:pPr indent="0" marL="0">
+              <a:buNone/>
+            </a:pPr>
+            <a:r>
+              <a:rPr lang="en-US" sz="1100" b="1" spc="250" kern="0" dirty="0">
+                <a:solidFill>
+                  <a:srgbClr val="A9A79F"/>
+                </a:solidFill>
+                <a:latin typeface="Arial" pitchFamily="34" charset="0"/>
+                <a:ea typeface="Arial" pitchFamily="34" charset="-122"/>
+                <a:cs typeface="Arial" pitchFamily="34" charset="-120"/>
+              </a:rPr>
+              <a:t>, IV, 94 E 95 (1 DE 2)</a:t>
             </a:r>
             <a:endParaRPr lang="en-US" sz="1100" dirty="0"/>
           </a:p>
@@ -3362,7 +3390,35 @@
                 <a:ea typeface="Arial" pitchFamily="34" charset="-122"/>
                 <a:cs typeface="Arial" pitchFamily="34" charset="-120"/>
               </a:rPr>
-              <a:t>Luís de Camões, Os Lusíadas (1572), IV, 94 e 95 (grafia modernizada).</a:t>
+              <a:t>Luís de Camões, </a:t>
+            </a:r>
+            <a:pPr indent="0" marL="0">
+              <a:buNone/>
+            </a:pPr>
+            <a:r>
+              <a:rPr lang="en-US" sz="1200" i="1" dirty="0">
+                <a:solidFill>
+                  <a:srgbClr val="A9A79F"/>
+                </a:solidFill>
+                <a:latin typeface="Arial" pitchFamily="34" charset="0"/>
+                <a:ea typeface="Arial" pitchFamily="34" charset="-122"/>
+                <a:cs typeface="Arial" pitchFamily="34" charset="-120"/>
+              </a:rPr>
+              <a:t>Os Lusíadas</a:t>
+            </a:r>
+            <a:pPr indent="0" marL="0">
+              <a:buNone/>
+            </a:pPr>
+            <a:r>
+              <a:rPr lang="en-US" sz="1200" dirty="0">
+                <a:solidFill>
+                  <a:srgbClr val="A9A79F"/>
+                </a:solidFill>
+                <a:latin typeface="Arial" pitchFamily="34" charset="0"/>
+                <a:ea typeface="Arial" pitchFamily="34" charset="-122"/>
+                <a:cs typeface="Arial" pitchFamily="34" charset="-120"/>
+              </a:rPr>
+              <a:t> (1572), IV, 94 e 95 (grafia modernizada).</a:t>
             </a:r>
             <a:endParaRPr lang="en-US" sz="1200" dirty="0"/>
           </a:p>
@@ -3597,7 +3653,35 @@
                 <a:ea typeface="Arial" pitchFamily="34" charset="-122"/>
                 <a:cs typeface="Arial" pitchFamily="34" charset="-120"/>
               </a:rPr>
-              <a:t>LER: OS LUSÍADAS, IV, 94 E 95 (2 DE 2)</a:t>
+              <a:t>LER: </a:t>
+            </a:r>
+            <a:pPr indent="0" marL="0">
+              <a:buNone/>
+            </a:pPr>
+            <a:r>
+              <a:rPr lang="en-US" sz="1100" b="1" i="1" spc="250" kern="0" dirty="0">
+                <a:solidFill>
+                  <a:srgbClr val="A9A79F"/>
+                </a:solidFill>
+                <a:latin typeface="Arial" pitchFamily="34" charset="0"/>
+                <a:ea typeface="Arial" pitchFamily="34" charset="-122"/>
+                <a:cs typeface="Arial" pitchFamily="34" charset="-120"/>
+              </a:rPr>
+              <a:t>OS LUSÍADAS</a:t>
+            </a:r>
+            <a:pPr indent="0" marL="0">
+              <a:buNone/>
+            </a:pPr>
+            <a:r>
+              <a:rPr lang="en-US" sz="1100" b="1" spc="250" kern="0" dirty="0">
+                <a:solidFill>
+                  <a:srgbClr val="A9A79F"/>
+                </a:solidFill>
+                <a:latin typeface="Arial" pitchFamily="34" charset="0"/>
+                <a:ea typeface="Arial" pitchFamily="34" charset="-122"/>
+                <a:cs typeface="Arial" pitchFamily="34" charset="-120"/>
+              </a:rPr>
+              <a:t>, IV, 94 E 95 (2 DE 2)</a:t>
             </a:r>
             <a:endParaRPr lang="en-US" sz="1100" dirty="0"/>
           </a:p>
@@ -3822,7 +3906,35 @@
                 <a:ea typeface="Arial" pitchFamily="34" charset="-122"/>
                 <a:cs typeface="Arial" pitchFamily="34" charset="-120"/>
               </a:rPr>
-              <a:t>Luís de Camões, Os Lusíadas (1572), IV, 94 e 95 (grafia modernizada).</a:t>
+              <a:t>Luís de Camões, </a:t>
+            </a:r>
+            <a:pPr indent="0" marL="0">
+              <a:buNone/>
+            </a:pPr>
+            <a:r>
+              <a:rPr lang="en-US" sz="1200" i="1" dirty="0">
+                <a:solidFill>
+                  <a:srgbClr val="A9A79F"/>
+                </a:solidFill>
+                <a:latin typeface="Arial" pitchFamily="34" charset="0"/>
+                <a:ea typeface="Arial" pitchFamily="34" charset="-122"/>
+                <a:cs typeface="Arial" pitchFamily="34" charset="-120"/>
+              </a:rPr>
+              <a:t>Os Lusíadas</a:t>
+            </a:r>
+            <a:pPr indent="0" marL="0">
+              <a:buNone/>
+            </a:pPr>
+            <a:r>
+              <a:rPr lang="en-US" sz="1200" dirty="0">
+                <a:solidFill>
+                  <a:srgbClr val="A9A79F"/>
+                </a:solidFill>
+                <a:latin typeface="Arial" pitchFamily="34" charset="0"/>
+                <a:ea typeface="Arial" pitchFamily="34" charset="-122"/>
+                <a:cs typeface="Arial" pitchFamily="34" charset="-120"/>
+              </a:rPr>
+              <a:t> (1572), IV, 94 e 95 (grafia modernizada).</a:t>
             </a:r>
             <a:endParaRPr lang="en-US" sz="1200" dirty="0"/>
           </a:p>
@@ -4337,7 +4449,41 @@
                 <a:ea typeface="Arial" pitchFamily="34" charset="-122"/>
                 <a:cs typeface="Arial" pitchFamily="34" charset="-120"/>
               </a:rPr>
-              <a:t>O edifício celebra o que o Velho do Restelo condena em Os Lusíadas (IV, 94 e 95): a «glória de mandar» e a «vã cobiça».</a:t>
+              <a:t>O edifício celebra o que o Velho do Restelo condena em </a:t>
+            </a:r>
+            <a:pPr indent="0" marL="0">
+              <a:lnSpc>
+                <a:spcPct val="105000"/>
+              </a:lnSpc>
+              <a:buNone/>
+            </a:pPr>
+            <a:r>
+              <a:rPr lang="en-US" sz="2200" i="1" dirty="0">
+                <a:solidFill>
+                  <a:srgbClr val="F2F0EA"/>
+                </a:solidFill>
+                <a:latin typeface="Arial" pitchFamily="34" charset="0"/>
+                <a:ea typeface="Arial" pitchFamily="34" charset="-122"/>
+                <a:cs typeface="Arial" pitchFamily="34" charset="-120"/>
+              </a:rPr>
+              <a:t>Os Lusíadas</a:t>
+            </a:r>
+            <a:pPr indent="0" marL="0">
+              <a:lnSpc>
+                <a:spcPct val="105000"/>
+              </a:lnSpc>
+              <a:buNone/>
+            </a:pPr>
+            <a:r>
+              <a:rPr lang="en-US" sz="2200" dirty="0">
+                <a:solidFill>
+                  <a:srgbClr val="F2F0EA"/>
+                </a:solidFill>
+                <a:latin typeface="Arial" pitchFamily="34" charset="0"/>
+                <a:ea typeface="Arial" pitchFamily="34" charset="-122"/>
+                <a:cs typeface="Arial" pitchFamily="34" charset="-120"/>
+              </a:rPr>
+              <a:t> (IV, 94 e 95): a «glória de mandar» e a «vã cobiça».</a:t>
             </a:r>
             <a:endParaRPr lang="en-US" sz="2200" dirty="0"/>
           </a:p>
@@ -5832,7 +5978,75 @@
                 <a:ea typeface="Georgia" pitchFamily="34" charset="-122"/>
                 <a:cs typeface="Georgia" pitchFamily="34" charset="-120"/>
               </a:rPr>
-              <a:t>O Mosteiro de Santa Maria de Belém foi mandado construir por D. Manuel I e entregue à Ordem de São Jerónimo; as obras começaram no início do séc. XVI. É o ponto culminante da arquitetura manuelina, Monumento Nacional desde 1907, Património Mundial da UNESCO desde 1983 (com a Torre de Belém) e Panteão Nacional desde 2016. Camões tem aí um túmulo. Os horários e as condições de visita confirmam-se na semana da visita.</a:t>
+              <a:t>O </a:t>
+            </a:r>
+            <a:pPr indent="0" marL="0">
+              <a:lnSpc>
+                <a:spcPct val="120000"/>
+              </a:lnSpc>
+              <a:buNone/>
+            </a:pPr>
+            <a:r>
+              <a:rPr lang="en-US" sz="2300" b="1" dirty="0">
+                <a:solidFill>
+                  <a:srgbClr val="F2F0EA"/>
+                </a:solidFill>
+                <a:latin typeface="Georgia" pitchFamily="34" charset="0"/>
+                <a:ea typeface="Georgia" pitchFamily="34" charset="-122"/>
+                <a:cs typeface="Georgia" pitchFamily="34" charset="-120"/>
+              </a:rPr>
+              <a:t>Mosteiro de Santa Maria de Belém</a:t>
+            </a:r>
+            <a:pPr indent="0" marL="0">
+              <a:lnSpc>
+                <a:spcPct val="120000"/>
+              </a:lnSpc>
+              <a:buNone/>
+            </a:pPr>
+            <a:r>
+              <a:rPr lang="en-US" sz="2300" dirty="0">
+                <a:solidFill>
+                  <a:srgbClr val="F2F0EA"/>
+                </a:solidFill>
+                <a:latin typeface="Georgia" pitchFamily="34" charset="0"/>
+                <a:ea typeface="Georgia" pitchFamily="34" charset="-122"/>
+                <a:cs typeface="Georgia" pitchFamily="34" charset="-120"/>
+              </a:rPr>
+              <a:t> foi mandado construir por D. Manuel I e entregue à Ordem de São Jerónimo; as obras começaram no início do séc. XVI. É o ponto culminante da arquitetura </a:t>
+            </a:r>
+            <a:pPr indent="0" marL="0">
+              <a:lnSpc>
+                <a:spcPct val="120000"/>
+              </a:lnSpc>
+              <a:buNone/>
+            </a:pPr>
+            <a:r>
+              <a:rPr lang="en-US" sz="2300" b="1" dirty="0">
+                <a:solidFill>
+                  <a:srgbClr val="F2F0EA"/>
+                </a:solidFill>
+                <a:latin typeface="Georgia" pitchFamily="34" charset="0"/>
+                <a:ea typeface="Georgia" pitchFamily="34" charset="-122"/>
+                <a:cs typeface="Georgia" pitchFamily="34" charset="-120"/>
+              </a:rPr>
+              <a:t>manuelina</a:t>
+            </a:r>
+            <a:pPr indent="0" marL="0">
+              <a:lnSpc>
+                <a:spcPct val="120000"/>
+              </a:lnSpc>
+              <a:buNone/>
+            </a:pPr>
+            <a:r>
+              <a:rPr lang="en-US" sz="2300" dirty="0">
+                <a:solidFill>
+                  <a:srgbClr val="F2F0EA"/>
+                </a:solidFill>
+                <a:latin typeface="Georgia" pitchFamily="34" charset="0"/>
+                <a:ea typeface="Georgia" pitchFamily="34" charset="-122"/>
+                <a:cs typeface="Georgia" pitchFamily="34" charset="-120"/>
+              </a:rPr>
+              <a:t>, Monumento Nacional desde 1907, Património Mundial da UNESCO desde 1983 (com a Torre de Belém) e Panteão Nacional desde 2016. Camões tem aí um túmulo. Os horários e as condições de visita confirmam-se na semana da visita.</a:t>
             </a:r>
             <a:endParaRPr lang="en-US" sz="2300" dirty="0"/>
           </a:p>
